--- a/data-eng/decks/w3d2s3.pptx
+++ b/data-eng/decks/w3d2s3.pptx
@@ -3100,7 +3100,7 @@
       <p:grpSpPr/>
       <p:sp>
         <p:nvSpPr>
-          <p:cNvPr id="2" name="Oval 1"/>
+          <p:cNvPr id="2" name="deckgen:decor"/>
           <p:cNvSpPr/>
           <p:nvPr/>
         </p:nvSpPr>
@@ -3130,7 +3130,7 @@
       </p:sp>
       <p:sp>
         <p:nvSpPr>
-          <p:cNvPr id="3" name="Oval 2"/>
+          <p:cNvPr id="3" name="deckgen:decor"/>
           <p:cNvSpPr/>
           <p:nvPr/>
         </p:nvSpPr>
@@ -3160,7 +3160,7 @@
       </p:sp>
       <p:sp>
         <p:nvSpPr>
-          <p:cNvPr id="4" name="Oval 3"/>
+          <p:cNvPr id="4" name="deckgen:decor"/>
           <p:cNvSpPr/>
           <p:nvPr/>
         </p:nvSpPr>
@@ -3190,7 +3190,7 @@
       </p:sp>
       <p:sp>
         <p:nvSpPr>
-          <p:cNvPr id="5" name="Rectangle 4"/>
+          <p:cNvPr id="5" name="deckgen:decor"/>
           <p:cNvSpPr/>
           <p:nvPr/>
         </p:nvSpPr>
@@ -3220,7 +3220,7 @@
       </p:sp>
       <p:sp>
         <p:nvSpPr>
-          <p:cNvPr id="6" name="Oval 5"/>
+          <p:cNvPr id="6" name="deckgen:decor"/>
           <p:cNvSpPr/>
           <p:nvPr/>
         </p:nvSpPr>
@@ -3250,7 +3250,7 @@
       </p:sp>
       <p:sp>
         <p:nvSpPr>
-          <p:cNvPr id="7" name="Oval 6"/>
+          <p:cNvPr id="7" name="deckgen:decor"/>
           <p:cNvSpPr/>
           <p:nvPr/>
         </p:nvSpPr>
@@ -3280,7 +3280,7 @@
       </p:sp>
       <p:sp>
         <p:nvSpPr>
-          <p:cNvPr id="8" name="Oval 7"/>
+          <p:cNvPr id="8" name="deckgen:decor"/>
           <p:cNvSpPr/>
           <p:nvPr/>
         </p:nvSpPr>
@@ -3310,7 +3310,7 @@
       </p:sp>
       <p:sp>
         <p:nvSpPr>
-          <p:cNvPr id="9" name="Oval 8"/>
+          <p:cNvPr id="9" name="deckgen:decor"/>
           <p:cNvSpPr/>
           <p:nvPr/>
         </p:nvSpPr>
@@ -3340,7 +3340,7 @@
       </p:sp>
       <p:sp>
         <p:nvSpPr>
-          <p:cNvPr id="10" name="Rectangle 9"/>
+          <p:cNvPr id="10" name="deckgen:decor"/>
           <p:cNvSpPr/>
           <p:nvPr/>
         </p:nvSpPr>
@@ -3600,7 +3600,7 @@
       <p:grpSpPr/>
       <p:sp>
         <p:nvSpPr>
-          <p:cNvPr id="2" name="Oval 1"/>
+          <p:cNvPr id="2" name="deckgen:decor"/>
           <p:cNvSpPr/>
           <p:nvPr/>
         </p:nvSpPr>
@@ -3630,7 +3630,7 @@
       </p:sp>
       <p:sp>
         <p:nvSpPr>
-          <p:cNvPr id="3" name="Oval 2"/>
+          <p:cNvPr id="3" name="deckgen:decor"/>
           <p:cNvSpPr/>
           <p:nvPr/>
         </p:nvSpPr>
@@ -3660,7 +3660,7 @@
       </p:sp>
       <p:sp>
         <p:nvSpPr>
-          <p:cNvPr id="4" name="Oval 3"/>
+          <p:cNvPr id="4" name="deckgen:decor"/>
           <p:cNvSpPr/>
           <p:nvPr/>
         </p:nvSpPr>
@@ -3941,7 +3941,7 @@
                 <a:ea typeface="Pretendard"/>
                 <a:cs typeface="Pretendard"/>
               </a:rPr>
-              <a:t>ts.index.dtype 이 datetime64[ns] · 기간 6-01 ~ 7-30 안팎</a:t>
+              <a:t>ts.index.dtype 이 datetime64[us] · 기간 6-01 ~ 7-30</a:t>
             </a:r>
           </a:p>
         </p:txBody>
@@ -4233,7 +4233,7 @@
                 <a:ea typeface="Pretendard"/>
                 <a:cs typeface="Pretendard"/>
               </a:rPr>
-              <a:t>주별 9~10행 · 월별 2행 · 월별 count 합 1015</a:t>
+              <a:t>주별 9행 · 월별 2행(476 · 509) · count 합 1015</a:t>
             </a:r>
           </a:p>
         </p:txBody>
@@ -4662,7 +4662,7 @@
       <p:grpSpPr/>
       <p:sp>
         <p:nvSpPr>
-          <p:cNvPr id="2" name="Oval 1"/>
+          <p:cNvPr id="2" name="deckgen:decor"/>
           <p:cNvSpPr/>
           <p:nvPr/>
         </p:nvSpPr>
@@ -4692,7 +4692,7 @@
       </p:sp>
       <p:sp>
         <p:nvSpPr>
-          <p:cNvPr id="3" name="Oval 2"/>
+          <p:cNvPr id="3" name="deckgen:decor"/>
           <p:cNvSpPr/>
           <p:nvPr/>
         </p:nvSpPr>
@@ -5469,7 +5469,7 @@
       <p:grpSpPr/>
       <p:sp>
         <p:nvSpPr>
-          <p:cNvPr id="2" name="Oval 1"/>
+          <p:cNvPr id="2" name="deckgen:decor"/>
           <p:cNvSpPr/>
           <p:nvPr/>
         </p:nvSpPr>
@@ -5499,7 +5499,7 @@
       </p:sp>
       <p:sp>
         <p:nvSpPr>
-          <p:cNvPr id="3" name="Oval 2"/>
+          <p:cNvPr id="3" name="deckgen:decor"/>
           <p:cNvSpPr/>
           <p:nvPr/>
         </p:nvSpPr>
@@ -5529,7 +5529,7 @@
       </p:sp>
       <p:sp>
         <p:nvSpPr>
-          <p:cNvPr id="4" name="Oval 3"/>
+          <p:cNvPr id="4" name="deckgen:decor"/>
           <p:cNvSpPr/>
           <p:nvPr/>
         </p:nvSpPr>
@@ -6248,7 +6248,7 @@
                 <a:ea typeface="Pretendard"/>
                 <a:cs typeface="Pretendard"/>
               </a:rPr>
-              <a:t>orders_enriched.parquet 를 저장한다 — 3-4·3-5 의 입력</a:t>
+              <a:t>orders_enriched.parquet 를 저장한다 — 3-3·3-4 의 입력</a:t>
             </a:r>
           </a:p>
         </p:txBody>
@@ -6460,7 +6460,7 @@
       <p:grpSpPr/>
       <p:sp>
         <p:nvSpPr>
-          <p:cNvPr id="2" name="Oval 1"/>
+          <p:cNvPr id="2" name="deckgen:decor"/>
           <p:cNvSpPr/>
           <p:nvPr/>
         </p:nvSpPr>
@@ -6490,7 +6490,7 @@
       </p:sp>
       <p:sp>
         <p:nvSpPr>
-          <p:cNvPr id="3" name="Oval 2"/>
+          <p:cNvPr id="3" name="deckgen:decor"/>
           <p:cNvSpPr/>
           <p:nvPr/>
         </p:nvSpPr>
@@ -6520,7 +6520,7 @@
       </p:sp>
       <p:sp>
         <p:nvSpPr>
-          <p:cNvPr id="4" name="Oval 3"/>
+          <p:cNvPr id="4" name="deckgen:decor"/>
           <p:cNvSpPr/>
           <p:nvPr/>
         </p:nvSpPr>
@@ -6696,7 +6696,7 @@
                 <a:ea typeface="Pretendard"/>
                 <a:cs typeface="Pretendard"/>
               </a:rPr>
-              <a:t>앞 실습에서 결합한 m(1015행) 이 세션에 남아 있어야 합니다</a:t>
+              <a:t>timeseries.py 한 파일에 1~6단계를 이어 붙인다 — 파일 머리에서 m 을 다시 만든다</a:t>
             </a:r>
           </a:p>
         </p:txBody>
@@ -7653,7 +7653,7 @@
       <p:grpSpPr/>
       <p:sp>
         <p:nvSpPr>
-          <p:cNvPr id="2" name="Oval 1"/>
+          <p:cNvPr id="2" name="deckgen:decor"/>
           <p:cNvSpPr/>
           <p:nvPr/>
         </p:nvSpPr>
@@ -7683,7 +7683,7 @@
       </p:sp>
       <p:sp>
         <p:nvSpPr>
-          <p:cNvPr id="3" name="Oval 2"/>
+          <p:cNvPr id="3" name="deckgen:decor"/>
           <p:cNvSpPr/>
           <p:nvPr/>
         </p:nvSpPr>
@@ -7713,7 +7713,7 @@
       </p:sp>
       <p:sp>
         <p:nvSpPr>
-          <p:cNvPr id="4" name="Oval 3"/>
+          <p:cNvPr id="4" name="deckgen:decor"/>
           <p:cNvSpPr/>
           <p:nvPr/>
         </p:nvSpPr>
@@ -8136,7 +8136,7 @@
                 <a:ea typeface="Pretendard"/>
                 <a:cs typeface="Pretendard"/>
               </a:rPr>
-              <a:t>ts.index.dtype → datetime64[ns]</a:t>
+              <a:t>ts.index.dtype → datetime64[us] (pandas 2: [ns])</a:t>
             </a:r>
           </a:p>
         </p:txBody>
@@ -8609,7 +8609,7 @@
                 <a:ea typeface="Pretendard"/>
                 <a:cs typeface="Pretendard"/>
               </a:rPr>
-              <a:t>기간 2026-06-01 ~ 07-30 안팎 — sort_index() 를 빼면 시계열 집계 결과가 어긋날 수 있다</a:t>
+              <a:t>기간 정확히 2026-06-01 ~ 07-30(60일) — sort_index() 를 빼면 rolling·기간 슬라이스가 어긋난다</a:t>
             </a:r>
           </a:p>
         </p:txBody>
@@ -8746,7 +8746,7 @@
       <p:grpSpPr/>
       <p:sp>
         <p:nvSpPr>
-          <p:cNvPr id="2" name="Oval 1"/>
+          <p:cNvPr id="2" name="deckgen:decor"/>
           <p:cNvSpPr/>
           <p:nvPr/>
         </p:nvSpPr>
@@ -8776,7 +8776,7 @@
       </p:sp>
       <p:sp>
         <p:nvSpPr>
-          <p:cNvPr id="3" name="Oval 2"/>
+          <p:cNvPr id="3" name="deckgen:decor"/>
           <p:cNvSpPr/>
           <p:nvPr/>
         </p:nvSpPr>
@@ -8806,7 +8806,7 @@
       </p:sp>
       <p:sp>
         <p:nvSpPr>
-          <p:cNvPr id="4" name="Oval 3"/>
+          <p:cNvPr id="4" name="deckgen:decor"/>
           <p:cNvSpPr/>
           <p:nvPr/>
         </p:nvSpPr>
@@ -9199,7 +9199,7 @@
                 <a:ea typeface="Pretendard"/>
                 <a:cs typeface="Pretendard"/>
               </a:rPr>
-              <a:t>'W' 주별 9~10행</a:t>
+              <a:t>'W' 주별 9행</a:t>
             </a:r>
           </a:p>
         </p:txBody>
@@ -9807,7 +9807,7 @@
       <p:grpSpPr/>
       <p:sp>
         <p:nvSpPr>
-          <p:cNvPr id="2" name="Oval 1"/>
+          <p:cNvPr id="2" name="deckgen:decor"/>
           <p:cNvSpPr/>
           <p:nvPr/>
         </p:nvSpPr>
@@ -9837,7 +9837,7 @@
       </p:sp>
       <p:sp>
         <p:nvSpPr>
-          <p:cNvPr id="3" name="Oval 2"/>
+          <p:cNvPr id="3" name="deckgen:decor"/>
           <p:cNvSpPr/>
           <p:nvPr/>
         </p:nvSpPr>
@@ -9867,7 +9867,7 @@
       </p:sp>
       <p:sp>
         <p:nvSpPr>
-          <p:cNvPr id="4" name="Oval 3"/>
+          <p:cNvPr id="4" name="deckgen:decor"/>
           <p:cNvSpPr/>
           <p:nvPr/>
         </p:nvSpPr>
@@ -10836,7 +10836,7 @@
       <p:grpSpPr/>
       <p:sp>
         <p:nvSpPr>
-          <p:cNvPr id="2" name="Oval 1"/>
+          <p:cNvPr id="2" name="deckgen:decor"/>
           <p:cNvSpPr/>
           <p:nvPr/>
         </p:nvSpPr>
@@ -10866,7 +10866,7 @@
       </p:sp>
       <p:sp>
         <p:nvSpPr>
-          <p:cNvPr id="3" name="Oval 2"/>
+          <p:cNvPr id="3" name="deckgen:decor"/>
           <p:cNvSpPr/>
           <p:nvPr/>
         </p:nvSpPr>
@@ -10896,7 +10896,7 @@
       </p:sp>
       <p:sp>
         <p:nvSpPr>
-          <p:cNvPr id="4" name="Oval 3"/>
+          <p:cNvPr id="4" name="deckgen:decor"/>
           <p:cNvSpPr/>
           <p:nvPr/>
         </p:nvSpPr>
@@ -11175,7 +11175,7 @@
                 <a:ea typeface="Pretendard"/>
                 <a:cs typeface="Pretendard"/>
               </a:rPr>
-              <a:t>ts['amount'].resample('W').sum() → 9~10행</a:t>
+              <a:t>ts['amount'].resample('W').sum() → 9행</a:t>
             </a:r>
           </a:p>
         </p:txBody>
@@ -11929,7 +11929,7 @@
       <p:grpSpPr/>
       <p:sp>
         <p:nvSpPr>
-          <p:cNvPr id="2" name="Oval 1"/>
+          <p:cNvPr id="2" name="deckgen:decor"/>
           <p:cNvSpPr/>
           <p:nvPr/>
         </p:nvSpPr>
@@ -11959,7 +11959,7 @@
       </p:sp>
       <p:sp>
         <p:nvSpPr>
-          <p:cNvPr id="3" name="Oval 2"/>
+          <p:cNvPr id="3" name="deckgen:decor"/>
           <p:cNvSpPr/>
           <p:nvPr/>
         </p:nvSpPr>
@@ -11989,7 +11989,7 @@
       </p:sp>
       <p:sp>
         <p:nvSpPr>
-          <p:cNvPr id="4" name="Oval 3"/>
+          <p:cNvPr id="4" name="deckgen:decor"/>
           <p:cNvSpPr/>
           <p:nvPr/>
         </p:nvSpPr>
@@ -13049,7 +13049,7 @@
       <p:grpSpPr/>
       <p:sp>
         <p:nvSpPr>
-          <p:cNvPr id="2" name="Oval 1"/>
+          <p:cNvPr id="2" name="deckgen:decor"/>
           <p:cNvSpPr/>
           <p:nvPr/>
         </p:nvSpPr>
@@ -13079,7 +13079,7 @@
       </p:sp>
       <p:sp>
         <p:nvSpPr>
-          <p:cNvPr id="3" name="Oval 2"/>
+          <p:cNvPr id="3" name="deckgen:decor"/>
           <p:cNvSpPr/>
           <p:nvPr/>
         </p:nvSpPr>
@@ -13109,7 +13109,7 @@
       </p:sp>
       <p:sp>
         <p:nvSpPr>
-          <p:cNvPr id="4" name="Oval 3"/>
+          <p:cNvPr id="4" name="deckgen:decor"/>
           <p:cNvSpPr/>
           <p:nvPr/>
         </p:nvSpPr>
@@ -13618,7 +13618,7 @@
                 <a:ea typeface="Pretendard"/>
                 <a:cs typeface="Pretendard"/>
               </a:rPr>
-              <a:t>열 목록에 region·joined 가 있으면 성공 — 3-4·3-5 의 입력</a:t>
+              <a:t>열 목록에 region·joined 가 있으면 성공 — 3-3·3-4 의 입력</a:t>
             </a:r>
           </a:p>
         </p:txBody>
